--- a/Ódor Artúr/érettségi/k_digkultfor_25okt_fl/idomero_35p.pptx
+++ b/Ódor Artúr/érettségi/k_digkultfor_25okt_fl/idomero_35p.pptx
@@ -111,6 +111,11 @@
       </a:defRPr>
     </a:lvl9pPr>
   </p:defaultTextStyle>
+  <p:extLst>
+    <p:ext uri="{EFAFB233-063F-42B5-8137-9DF3F51BA10A}">
+      <p15:sldGuideLst xmlns:p15="http://schemas.microsoft.com/office/powerpoint/2012/main"/>
+    </p:ext>
+  </p:extLst>
 </p:presentation>
 </file>
 
@@ -564,7 +569,7 @@
           <a:p>
             <a:fld id="{9E834B55-E9BE-4011-8ABB-455DF999B24F}" type="datetimeFigureOut">
               <a:rPr lang="hu-HU" smtClean="0"/>
-              <a:t>2026. 09. 05.</a:t>
+              <a:t>2026. 09. 07.</a:t>
             </a:fld>
             <a:endParaRPr lang="hu-HU"/>
           </a:p>
@@ -1049,7 +1054,7 @@
           <a:p>
             <a:fld id="{AE86C1FA-8BB8-4124-BB39-9AA43FB28FD1}" type="datetimeFigureOut">
               <a:rPr lang="hu-HU" smtClean="0"/>
-              <a:t>2026. 09. 05.</a:t>
+              <a:t>2026. 09. 07.</a:t>
             </a:fld>
             <a:endParaRPr lang="hu-HU"/>
           </a:p>
@@ -1107,13 +1112,13 @@
   <p:clrMapOvr>
     <a:masterClrMapping/>
   </p:clrMapOvr>
-  <mc:AlternateContent xmlns:mc="http://schemas.openxmlformats.org/markup-compatibility/2006">
-    <mc:Choice xmlns:p15="http://schemas.microsoft.com/office/powerpoint/2012/main" Requires="p15">
+  <mc:AlternateContent xmlns:mc="http://schemas.openxmlformats.org/markup-compatibility/2006" xmlns:p15="http://schemas.microsoft.com/office/powerpoint/2012/main">
+    <mc:Choice Requires="p15">
       <p:transition xmlns:p14="http://schemas.microsoft.com/office/powerpoint/2010/main" spd="slow" p14:dur="2000">
         <p15:prstTrans prst="drape"/>
       </p:transition>
     </mc:Choice>
-    <mc:Fallback>
+    <mc:Fallback xmlns="">
       <p:transition spd="slow">
         <p:fade/>
       </p:transition>
@@ -1231,7 +1236,7 @@
           <a:p>
             <a:fld id="{AE86C1FA-8BB8-4124-BB39-9AA43FB28FD1}" type="datetimeFigureOut">
               <a:rPr lang="hu-HU" smtClean="0"/>
-              <a:t>2026. 09. 05.</a:t>
+              <a:t>2026. 09. 07.</a:t>
             </a:fld>
             <a:endParaRPr lang="hu-HU"/>
           </a:p>
@@ -1289,13 +1294,13 @@
   <p:clrMapOvr>
     <a:masterClrMapping/>
   </p:clrMapOvr>
-  <mc:AlternateContent xmlns:mc="http://schemas.openxmlformats.org/markup-compatibility/2006">
-    <mc:Choice xmlns:p15="http://schemas.microsoft.com/office/powerpoint/2012/main" Requires="p15">
+  <mc:AlternateContent xmlns:mc="http://schemas.openxmlformats.org/markup-compatibility/2006" xmlns:p15="http://schemas.microsoft.com/office/powerpoint/2012/main">
+    <mc:Choice Requires="p15">
       <p:transition xmlns:p14="http://schemas.microsoft.com/office/powerpoint/2010/main" spd="slow" p14:dur="2000">
         <p15:prstTrans prst="drape"/>
       </p:transition>
     </mc:Choice>
-    <mc:Fallback>
+    <mc:Fallback xmlns="">
       <p:transition spd="slow">
         <p:fade/>
       </p:transition>
@@ -1423,7 +1428,7 @@
           <a:p>
             <a:fld id="{AE86C1FA-8BB8-4124-BB39-9AA43FB28FD1}" type="datetimeFigureOut">
               <a:rPr lang="hu-HU" smtClean="0"/>
-              <a:t>2026. 09. 05.</a:t>
+              <a:t>2026. 09. 07.</a:t>
             </a:fld>
             <a:endParaRPr lang="hu-HU"/>
           </a:p>
@@ -1481,13 +1486,13 @@
   <p:clrMapOvr>
     <a:masterClrMapping/>
   </p:clrMapOvr>
-  <mc:AlternateContent xmlns:mc="http://schemas.openxmlformats.org/markup-compatibility/2006">
-    <mc:Choice xmlns:p15="http://schemas.microsoft.com/office/powerpoint/2012/main" Requires="p15">
+  <mc:AlternateContent xmlns:mc="http://schemas.openxmlformats.org/markup-compatibility/2006" xmlns:p15="http://schemas.microsoft.com/office/powerpoint/2012/main">
+    <mc:Choice Requires="p15">
       <p:transition xmlns:p14="http://schemas.microsoft.com/office/powerpoint/2010/main" spd="slow" p14:dur="2000">
         <p15:prstTrans prst="drape"/>
       </p:transition>
     </mc:Choice>
-    <mc:Fallback>
+    <mc:Fallback xmlns="">
       <p:transition spd="slow">
         <p:fade/>
       </p:transition>
@@ -1605,7 +1610,7 @@
           <a:p>
             <a:fld id="{AE86C1FA-8BB8-4124-BB39-9AA43FB28FD1}" type="datetimeFigureOut">
               <a:rPr lang="hu-HU" smtClean="0"/>
-              <a:t>2026. 09. 05.</a:t>
+              <a:t>2026. 09. 07.</a:t>
             </a:fld>
             <a:endParaRPr lang="hu-HU"/>
           </a:p>
@@ -1663,13 +1668,13 @@
   <p:clrMapOvr>
     <a:masterClrMapping/>
   </p:clrMapOvr>
-  <mc:AlternateContent xmlns:mc="http://schemas.openxmlformats.org/markup-compatibility/2006">
-    <mc:Choice xmlns:p15="http://schemas.microsoft.com/office/powerpoint/2012/main" Requires="p15">
+  <mc:AlternateContent xmlns:mc="http://schemas.openxmlformats.org/markup-compatibility/2006" xmlns:p15="http://schemas.microsoft.com/office/powerpoint/2012/main">
+    <mc:Choice Requires="p15">
       <p:transition xmlns:p14="http://schemas.microsoft.com/office/powerpoint/2010/main" spd="slow" p14:dur="2000">
         <p15:prstTrans prst="drape"/>
       </p:transition>
     </mc:Choice>
-    <mc:Fallback>
+    <mc:Fallback xmlns="">
       <p:transition spd="slow">
         <p:fade/>
       </p:transition>
@@ -1863,7 +1868,7 @@
           <a:p>
             <a:fld id="{AE86C1FA-8BB8-4124-BB39-9AA43FB28FD1}" type="datetimeFigureOut">
               <a:rPr lang="hu-HU" smtClean="0"/>
-              <a:t>2026. 09. 05.</a:t>
+              <a:t>2026. 09. 07.</a:t>
             </a:fld>
             <a:endParaRPr lang="hu-HU"/>
           </a:p>
@@ -1921,13 +1926,13 @@
   <p:clrMapOvr>
     <a:masterClrMapping/>
   </p:clrMapOvr>
-  <mc:AlternateContent xmlns:mc="http://schemas.openxmlformats.org/markup-compatibility/2006">
-    <mc:Choice xmlns:p15="http://schemas.microsoft.com/office/powerpoint/2012/main" Requires="p15">
+  <mc:AlternateContent xmlns:mc="http://schemas.openxmlformats.org/markup-compatibility/2006" xmlns:p15="http://schemas.microsoft.com/office/powerpoint/2012/main">
+    <mc:Choice Requires="p15">
       <p:transition xmlns:p14="http://schemas.microsoft.com/office/powerpoint/2010/main" spd="slow" p14:dur="2000">
         <p15:prstTrans prst="drape"/>
       </p:transition>
     </mc:Choice>
-    <mc:Fallback>
+    <mc:Fallback xmlns="">
       <p:transition spd="slow">
         <p:fade/>
       </p:transition>
@@ -2107,7 +2112,7 @@
           <a:p>
             <a:fld id="{AE86C1FA-8BB8-4124-BB39-9AA43FB28FD1}" type="datetimeFigureOut">
               <a:rPr lang="hu-HU" smtClean="0"/>
-              <a:t>2026. 09. 05.</a:t>
+              <a:t>2026. 09. 07.</a:t>
             </a:fld>
             <a:endParaRPr lang="hu-HU"/>
           </a:p>
@@ -2165,13 +2170,13 @@
   <p:clrMapOvr>
     <a:masterClrMapping/>
   </p:clrMapOvr>
-  <mc:AlternateContent xmlns:mc="http://schemas.openxmlformats.org/markup-compatibility/2006">
-    <mc:Choice xmlns:p15="http://schemas.microsoft.com/office/powerpoint/2012/main" Requires="p15">
+  <mc:AlternateContent xmlns:mc="http://schemas.openxmlformats.org/markup-compatibility/2006" xmlns:p15="http://schemas.microsoft.com/office/powerpoint/2012/main">
+    <mc:Choice Requires="p15">
       <p:transition xmlns:p14="http://schemas.microsoft.com/office/powerpoint/2010/main" spd="slow" p14:dur="2000">
         <p15:prstTrans prst="drape"/>
       </p:transition>
     </mc:Choice>
-    <mc:Fallback>
+    <mc:Fallback xmlns="">
       <p:transition spd="slow">
         <p:fade/>
       </p:transition>
@@ -2486,7 +2491,7 @@
           <a:p>
             <a:fld id="{AE86C1FA-8BB8-4124-BB39-9AA43FB28FD1}" type="datetimeFigureOut">
               <a:rPr lang="hu-HU" smtClean="0"/>
-              <a:t>2026. 09. 05.</a:t>
+              <a:t>2026. 09. 07.</a:t>
             </a:fld>
             <a:endParaRPr lang="hu-HU"/>
           </a:p>
@@ -2544,13 +2549,13 @@
   <p:clrMapOvr>
     <a:masterClrMapping/>
   </p:clrMapOvr>
-  <mc:AlternateContent xmlns:mc="http://schemas.openxmlformats.org/markup-compatibility/2006">
-    <mc:Choice xmlns:p15="http://schemas.microsoft.com/office/powerpoint/2012/main" Requires="p15">
+  <mc:AlternateContent xmlns:mc="http://schemas.openxmlformats.org/markup-compatibility/2006" xmlns:p15="http://schemas.microsoft.com/office/powerpoint/2012/main">
+    <mc:Choice Requires="p15">
       <p:transition xmlns:p14="http://schemas.microsoft.com/office/powerpoint/2010/main" spd="slow" p14:dur="2000">
         <p15:prstTrans prst="drape"/>
       </p:transition>
     </mc:Choice>
-    <mc:Fallback>
+    <mc:Fallback xmlns="">
       <p:transition spd="slow">
         <p:fade/>
       </p:transition>
@@ -2616,7 +2621,7 @@
           <a:p>
             <a:fld id="{AE86C1FA-8BB8-4124-BB39-9AA43FB28FD1}" type="datetimeFigureOut">
               <a:rPr lang="hu-HU" smtClean="0"/>
-              <a:t>2026. 09. 05.</a:t>
+              <a:t>2026. 09. 07.</a:t>
             </a:fld>
             <a:endParaRPr lang="hu-HU"/>
           </a:p>
@@ -2674,13 +2679,13 @@
   <p:clrMapOvr>
     <a:masterClrMapping/>
   </p:clrMapOvr>
-  <mc:AlternateContent xmlns:mc="http://schemas.openxmlformats.org/markup-compatibility/2006">
-    <mc:Choice xmlns:p15="http://schemas.microsoft.com/office/powerpoint/2012/main" Requires="p15">
+  <mc:AlternateContent xmlns:mc="http://schemas.openxmlformats.org/markup-compatibility/2006" xmlns:p15="http://schemas.microsoft.com/office/powerpoint/2012/main">
+    <mc:Choice Requires="p15">
       <p:transition xmlns:p14="http://schemas.microsoft.com/office/powerpoint/2010/main" spd="slow" p14:dur="2000">
         <p15:prstTrans prst="drape"/>
       </p:transition>
     </mc:Choice>
-    <mc:Fallback>
+    <mc:Fallback xmlns="">
       <p:transition spd="slow">
         <p:fade/>
       </p:transition>
@@ -2723,7 +2728,7 @@
           <a:p>
             <a:fld id="{AE86C1FA-8BB8-4124-BB39-9AA43FB28FD1}" type="datetimeFigureOut">
               <a:rPr lang="hu-HU" smtClean="0"/>
-              <a:t>2026. 09. 05.</a:t>
+              <a:t>2026. 09. 07.</a:t>
             </a:fld>
             <a:endParaRPr lang="hu-HU"/>
           </a:p>
@@ -2781,13 +2786,13 @@
   <p:clrMapOvr>
     <a:masterClrMapping/>
   </p:clrMapOvr>
-  <mc:AlternateContent xmlns:mc="http://schemas.openxmlformats.org/markup-compatibility/2006">
-    <mc:Choice xmlns:p15="http://schemas.microsoft.com/office/powerpoint/2012/main" Requires="p15">
+  <mc:AlternateContent xmlns:mc="http://schemas.openxmlformats.org/markup-compatibility/2006" xmlns:p15="http://schemas.microsoft.com/office/powerpoint/2012/main">
+    <mc:Choice Requires="p15">
       <p:transition xmlns:p14="http://schemas.microsoft.com/office/powerpoint/2010/main" spd="slow" p14:dur="2000">
         <p15:prstTrans prst="drape"/>
       </p:transition>
     </mc:Choice>
-    <mc:Fallback>
+    <mc:Fallback xmlns="">
       <p:transition spd="slow">
         <p:fade/>
       </p:transition>
@@ -3012,7 +3017,7 @@
           <a:p>
             <a:fld id="{AE86C1FA-8BB8-4124-BB39-9AA43FB28FD1}" type="datetimeFigureOut">
               <a:rPr lang="hu-HU" smtClean="0"/>
-              <a:t>2026. 09. 05.</a:t>
+              <a:t>2026. 09. 07.</a:t>
             </a:fld>
             <a:endParaRPr lang="hu-HU"/>
           </a:p>
@@ -3070,13 +3075,13 @@
   <p:clrMapOvr>
     <a:masterClrMapping/>
   </p:clrMapOvr>
-  <mc:AlternateContent xmlns:mc="http://schemas.openxmlformats.org/markup-compatibility/2006">
-    <mc:Choice xmlns:p15="http://schemas.microsoft.com/office/powerpoint/2012/main" Requires="p15">
+  <mc:AlternateContent xmlns:mc="http://schemas.openxmlformats.org/markup-compatibility/2006" xmlns:p15="http://schemas.microsoft.com/office/powerpoint/2012/main">
+    <mc:Choice Requires="p15">
       <p:transition xmlns:p14="http://schemas.microsoft.com/office/powerpoint/2010/main" spd="slow" p14:dur="2000">
         <p15:prstTrans prst="drape"/>
       </p:transition>
     </mc:Choice>
-    <mc:Fallback>
+    <mc:Fallback xmlns="">
       <p:transition spd="slow">
         <p:fade/>
       </p:transition>
@@ -3281,7 +3286,7 @@
           <a:p>
             <a:fld id="{AE86C1FA-8BB8-4124-BB39-9AA43FB28FD1}" type="datetimeFigureOut">
               <a:rPr lang="hu-HU" smtClean="0"/>
-              <a:t>2026. 09. 05.</a:t>
+              <a:t>2026. 09. 07.</a:t>
             </a:fld>
             <a:endParaRPr lang="hu-HU"/>
           </a:p>
@@ -3339,13 +3344,13 @@
   <p:clrMapOvr>
     <a:masterClrMapping/>
   </p:clrMapOvr>
-  <mc:AlternateContent xmlns:mc="http://schemas.openxmlformats.org/markup-compatibility/2006">
-    <mc:Choice xmlns:p15="http://schemas.microsoft.com/office/powerpoint/2012/main" Requires="p15">
+  <mc:AlternateContent xmlns:mc="http://schemas.openxmlformats.org/markup-compatibility/2006" xmlns:p15="http://schemas.microsoft.com/office/powerpoint/2012/main">
+    <mc:Choice Requires="p15">
       <p:transition xmlns:p14="http://schemas.microsoft.com/office/powerpoint/2010/main" spd="slow" p14:dur="2000">
         <p15:prstTrans prst="drape"/>
       </p:transition>
     </mc:Choice>
-    <mc:Fallback>
+    <mc:Fallback xmlns="">
       <p:transition spd="slow">
         <p:fade/>
       </p:transition>
@@ -3521,7 +3526,7 @@
           <a:p>
             <a:fld id="{AE86C1FA-8BB8-4124-BB39-9AA43FB28FD1}" type="datetimeFigureOut">
               <a:rPr lang="hu-HU" smtClean="0"/>
-              <a:t>2026. 09. 05.</a:t>
+              <a:t>2026. 09. 07.</a:t>
             </a:fld>
             <a:endParaRPr lang="hu-HU"/>
           </a:p>
@@ -3626,13 +3631,13 @@
     <p:sldLayoutId id="2147483670" r:id="rId10"/>
     <p:sldLayoutId id="2147483671" r:id="rId11"/>
   </p:sldLayoutIdLst>
-  <mc:AlternateContent xmlns:mc="http://schemas.openxmlformats.org/markup-compatibility/2006">
-    <mc:Choice xmlns:p15="http://schemas.microsoft.com/office/powerpoint/2012/main" Requires="p15">
+  <mc:AlternateContent xmlns:mc="http://schemas.openxmlformats.org/markup-compatibility/2006" xmlns:p15="http://schemas.microsoft.com/office/powerpoint/2012/main">
+    <mc:Choice Requires="p15">
       <p:transition xmlns:p14="http://schemas.microsoft.com/office/powerpoint/2010/main" spd="slow" p14:dur="2000">
         <p15:prstTrans prst="drape"/>
       </p:transition>
     </mc:Choice>
-    <mc:Fallback>
+    <mc:Fallback xmlns="">
       <p:transition spd="slow">
         <p:fade/>
       </p:transition>
@@ -4009,13 +4014,13 @@
   <p:clrMapOvr>
     <a:masterClrMapping/>
   </p:clrMapOvr>
-  <mc:AlternateContent xmlns:mc="http://schemas.openxmlformats.org/markup-compatibility/2006">
-    <mc:Choice xmlns:p15="http://schemas.microsoft.com/office/powerpoint/2012/main" Requires="p15">
+  <mc:AlternateContent xmlns:mc="http://schemas.openxmlformats.org/markup-compatibility/2006" xmlns:p15="http://schemas.microsoft.com/office/powerpoint/2012/main">
+    <mc:Choice Requires="p15">
       <p:transition xmlns:p14="http://schemas.microsoft.com/office/powerpoint/2010/main" spd="slow" p14:dur="2000">
         <p15:prstTrans prst="drape"/>
       </p:transition>
     </mc:Choice>
-    <mc:Fallback>
+    <mc:Fallback xmlns="">
       <p:transition spd="slow">
         <p:fade/>
       </p:transition>
@@ -4211,13 +4216,13 @@
   <p:clrMapOvr>
     <a:masterClrMapping/>
   </p:clrMapOvr>
-  <mc:AlternateContent xmlns:mc="http://schemas.openxmlformats.org/markup-compatibility/2006">
-    <mc:Choice xmlns:p15="http://schemas.microsoft.com/office/powerpoint/2012/main" Requires="p15">
+  <mc:AlternateContent xmlns:mc="http://schemas.openxmlformats.org/markup-compatibility/2006" xmlns:p15="http://schemas.microsoft.com/office/powerpoint/2012/main">
+    <mc:Choice Requires="p15">
       <p:transition xmlns:p14="http://schemas.microsoft.com/office/powerpoint/2010/main" spd="slow" p14:dur="2000">
         <p15:prstTrans prst="drape"/>
       </p:transition>
     </mc:Choice>
-    <mc:Fallback>
+    <mc:Fallback xmlns="">
       <p:transition spd="slow">
         <p:fade/>
       </p:transition>
@@ -4386,13 +4391,13 @@
   <p:clrMapOvr>
     <a:masterClrMapping/>
   </p:clrMapOvr>
-  <mc:AlternateContent xmlns:mc="http://schemas.openxmlformats.org/markup-compatibility/2006">
-    <mc:Choice xmlns:p15="http://schemas.microsoft.com/office/powerpoint/2012/main" Requires="p15">
+  <mc:AlternateContent xmlns:mc="http://schemas.openxmlformats.org/markup-compatibility/2006" xmlns:p15="http://schemas.microsoft.com/office/powerpoint/2012/main">
+    <mc:Choice Requires="p15">
       <p:transition xmlns:p14="http://schemas.microsoft.com/office/powerpoint/2010/main" spd="slow" p14:dur="2000">
         <p15:prstTrans prst="drape"/>
       </p:transition>
     </mc:Choice>
-    <mc:Fallback>
+    <mc:Fallback xmlns="">
       <p:transition spd="slow">
         <p:fade/>
       </p:transition>
@@ -4559,13 +4564,13 @@
   <p:clrMapOvr>
     <a:masterClrMapping/>
   </p:clrMapOvr>
-  <mc:AlternateContent xmlns:mc="http://schemas.openxmlformats.org/markup-compatibility/2006">
-    <mc:Choice xmlns:p15="http://schemas.microsoft.com/office/powerpoint/2012/main" Requires="p15">
+  <mc:AlternateContent xmlns:mc="http://schemas.openxmlformats.org/markup-compatibility/2006" xmlns:p15="http://schemas.microsoft.com/office/powerpoint/2012/main">
+    <mc:Choice Requires="p15">
       <p:transition xmlns:p14="http://schemas.microsoft.com/office/powerpoint/2010/main" spd="slow" p14:dur="2000">
         <p15:prstTrans prst="drape"/>
       </p:transition>
     </mc:Choice>
-    <mc:Fallback>
+    <mc:Fallback xmlns="">
       <p:transition spd="slow">
         <p:fade/>
       </p:transition>
@@ -5065,13 +5070,13 @@
   <p:clrMapOvr>
     <a:masterClrMapping/>
   </p:clrMapOvr>
-  <mc:AlternateContent xmlns:mc="http://schemas.openxmlformats.org/markup-compatibility/2006">
-    <mc:Choice xmlns:p15="http://schemas.microsoft.com/office/powerpoint/2012/main" Requires="p15">
+  <mc:AlternateContent xmlns:mc="http://schemas.openxmlformats.org/markup-compatibility/2006" xmlns:p15="http://schemas.microsoft.com/office/powerpoint/2012/main">
+    <mc:Choice Requires="p15">
       <p:transition xmlns:p14="http://schemas.microsoft.com/office/powerpoint/2010/main" spd="slow" p14:dur="2000">
         <p15:prstTrans prst="drape"/>
       </p:transition>
     </mc:Choice>
-    <mc:Fallback>
+    <mc:Fallback xmlns="">
       <p:transition spd="slow">
         <p:fade/>
       </p:transition>
